--- a/presentation/UNanofabTools/flaskserver/slides/14-Security-Model.pptx
+++ b/presentation/UNanofabTools/flaskserver/slides/14-Security-Model.pptx
@@ -1128,7 +1128,7 @@
           <a:p>
             <a:r>
               <a:rPr lang="en-US" dirty="0"/>
-              <a:t>Be transparent about the trade-offs. The chemical inventory pages, including editing and removing, currently require no login — fine for a read-only kiosk, a real gap for the changing actions. The device endpoints have no login, relying on the private network instead. Cross-origin access is broad by default. And password reset leans on the university ID without a second factor. None of these are catastrophic for an internal tool on a trusted network, but they're the things to fix first if exposure ever increases. All are itemized in the separate issues list with recommended fixes.</a:t>
+              <a:t>Be transparent about the trade-offs. The biggest gap here — the chemical inventory pages requiring no login — was closed on 2026-06-25: all /chem pages now sit behind a WordPress single-sign-on (a signed staff-tools link), so reading and editing both require sign-in. The device endpoints have no login, relying on the private network instead. Cross-origin access is broad by default. And password reset leans on the university ID without a second factor. None of these are catastrophic for an internal tool on a trusted network, but they're the things to fix first if exposure ever increases. All are itemized in the separate issues list with recommended fixes.</a:t>
             </a:r>
             <a:endParaRPr lang="en-US" dirty="0"/>
           </a:p>
@@ -4204,7 +4204,7 @@
                           <a:ea typeface="Calibri" pitchFamily="34" charset="-122"/>
                           <a:cs typeface="Calibri" pitchFamily="34" charset="-120"/>
                         </a:rPr>
-                        <a:t>Inventory has no login</a:t>
+                        <a:t>Device endpoints have no login</a:t>
                       </a:r>
                       <a:endParaRPr lang="en-US" sz="1150" dirty="0">
                         <a:latin typeface="Calibri" charset="0"/>
@@ -4272,7 +4272,7 @@
                           <a:ea typeface="Calibri" pitchFamily="34" charset="-122"/>
                           <a:cs typeface="Calibri" pitchFamily="34" charset="-120"/>
                         </a:rPr>
-                        <a:t>Convenient kiosk reads, but edit/remove are open</a:t>
+                        <a:t>Trusted via private network, not authentication</a:t>
                       </a:r>
                       <a:endParaRPr lang="en-US" sz="1150" dirty="0">
                         <a:latin typeface="Calibri" charset="0"/>
@@ -4342,7 +4342,7 @@
                           <a:ea typeface="Calibri" pitchFamily="34" charset="-122"/>
                           <a:cs typeface="Calibri" pitchFamily="34" charset="-120"/>
                         </a:rPr>
-                        <a:t>Device endpoints have no login</a:t>
+                        <a:t>Cross-origin access is wide open</a:t>
                       </a:r>
                       <a:endParaRPr lang="en-US" sz="1150" dirty="0">
                         <a:latin typeface="Calibri" charset="0"/>
@@ -4410,7 +4410,7 @@
                           <a:ea typeface="Calibri" pitchFamily="34" charset="-122"/>
                           <a:cs typeface="Calibri" pitchFamily="34" charset="-120"/>
                         </a:rPr>
-                        <a:t>Trusted via private network, not authentication</a:t>
+                        <a:t>Broad by default; could be narrowed</a:t>
                       </a:r>
                       <a:endParaRPr lang="en-US" sz="1150" dirty="0">
                         <a:latin typeface="Calibri" charset="0"/>
@@ -4480,7 +4480,7 @@
                           <a:ea typeface="Calibri" pitchFamily="34" charset="-122"/>
                           <a:cs typeface="Calibri" pitchFamily="34" charset="-120"/>
                         </a:rPr>
-                        <a:t>Cross-origin access is wide open</a:t>
+                        <a:t>Password reset uses only the uNID</a:t>
                       </a:r>
                       <a:endParaRPr lang="en-US" sz="1150" dirty="0">
                         <a:latin typeface="Calibri" charset="0"/>
@@ -4548,7 +4548,7 @@
                           <a:ea typeface="Calibri" pitchFamily="34" charset="-122"/>
                           <a:cs typeface="Calibri" pitchFamily="34" charset="-120"/>
                         </a:rPr>
-                        <a:t>Broad by default; could be narrowed</a:t>
+                        <a:t>No second factor on reset</a:t>
                       </a:r>
                       <a:endParaRPr lang="en-US" sz="1150" dirty="0">
                         <a:latin typeface="Calibri" charset="0"/>
@@ -4596,144 +4596,6 @@
                     </a:lnB>
                     <a:solidFill>
                       <a:srgbClr val="FFFFFF"/>
-                    </a:solidFill>
-                  </a:tcPr>
-                </a:tc>
-              </a:tr>
-              <a:tr h="274320">
-                <a:tc>
-                  <a:txBody>
-                    <a:bodyPr/>
-                    <a:lstStyle/>
-                    <a:p>
-                      <a:pPr algn="l" indent="0" marL="0">
-                        <a:buNone/>
-                      </a:pPr>
-                      <a:r>
-                        <a:rPr lang="en-US" sz="1150" dirty="0">
-                          <a:solidFill>
-                            <a:srgbClr val="1A1A1A"/>
-                          </a:solidFill>
-                          <a:latin typeface="Calibri" pitchFamily="34" charset="0"/>
-                          <a:ea typeface="Calibri" pitchFamily="34" charset="-122"/>
-                          <a:cs typeface="Calibri" pitchFamily="34" charset="-120"/>
-                        </a:rPr>
-                        <a:t>Password reset uses only the uNID</a:t>
-                      </a:r>
-                      <a:endParaRPr lang="en-US" sz="1150" dirty="0">
-                        <a:latin typeface="Calibri" charset="0"/>
-                        <a:ea typeface="Calibri" charset="0"/>
-                        <a:cs typeface="Calibri" charset="0"/>
-                      </a:endParaRPr>
-                    </a:p>
-                  </a:txBody>
-                  <a:tcPr marL="91440" marR="91440" marT="45720" marB="45720" anchor="ctr">
-                    <a:lnL w="6350" cap="flat" cmpd="sng" algn="ctr">
-                      <a:solidFill>
-                        <a:srgbClr val="DDDDDD"/>
-                      </a:solidFill>
-                      <a:prstDash val="solid"/>
-                      <a:round/>
-                      <a:headEnd type="none" w="med" len="med"/>
-                      <a:tailEnd type="none" w="med" len="med"/>
-                    </a:lnL>
-                    <a:lnR w="6350" cap="flat" cmpd="sng" algn="ctr">
-                      <a:solidFill>
-                        <a:srgbClr val="DDDDDD"/>
-                      </a:solidFill>
-                      <a:prstDash val="solid"/>
-                      <a:round/>
-                      <a:headEnd type="none" w="med" len="med"/>
-                      <a:tailEnd type="none" w="med" len="med"/>
-                    </a:lnR>
-                    <a:lnT w="6350" cap="flat" cmpd="sng" algn="ctr">
-                      <a:solidFill>
-                        <a:srgbClr val="DDDDDD"/>
-                      </a:solidFill>
-                      <a:prstDash val="solid"/>
-                      <a:round/>
-                      <a:headEnd type="none" w="med" len="med"/>
-                      <a:tailEnd type="none" w="med" len="med"/>
-                    </a:lnT>
-                    <a:lnB w="6350" cap="flat" cmpd="sng" algn="ctr">
-                      <a:solidFill>
-                        <a:srgbClr val="DDDDDD"/>
-                      </a:solidFill>
-                      <a:prstDash val="solid"/>
-                      <a:round/>
-                      <a:headEnd type="none" w="med" len="med"/>
-                      <a:tailEnd type="none" w="med" len="med"/>
-                    </a:lnB>
-                    <a:solidFill>
-                      <a:srgbClr val="F2F2F2"/>
-                    </a:solidFill>
-                  </a:tcPr>
-                </a:tc>
-                <a:tc>
-                  <a:txBody>
-                    <a:bodyPr/>
-                    <a:lstStyle/>
-                    <a:p>
-                      <a:pPr algn="l" indent="0" marL="0">
-                        <a:buNone/>
-                      </a:pPr>
-                      <a:r>
-                        <a:rPr lang="en-US" sz="1150" dirty="0">
-                          <a:solidFill>
-                            <a:srgbClr val="1A1A1A"/>
-                          </a:solidFill>
-                          <a:latin typeface="Calibri" pitchFamily="34" charset="0"/>
-                          <a:ea typeface="Calibri" pitchFamily="34" charset="-122"/>
-                          <a:cs typeface="Calibri" pitchFamily="34" charset="-120"/>
-                        </a:rPr>
-                        <a:t>No second factor on reset</a:t>
-                      </a:r>
-                      <a:endParaRPr lang="en-US" sz="1150" dirty="0">
-                        <a:latin typeface="Calibri" charset="0"/>
-                        <a:ea typeface="Calibri" charset="0"/>
-                        <a:cs typeface="Calibri" charset="0"/>
-                      </a:endParaRPr>
-                    </a:p>
-                  </a:txBody>
-                  <a:tcPr marL="91440" marR="91440" marT="45720" marB="45720" anchor="ctr">
-                    <a:lnL w="6350" cap="flat" cmpd="sng" algn="ctr">
-                      <a:solidFill>
-                        <a:srgbClr val="DDDDDD"/>
-                      </a:solidFill>
-                      <a:prstDash val="solid"/>
-                      <a:round/>
-                      <a:headEnd type="none" w="med" len="med"/>
-                      <a:tailEnd type="none" w="med" len="med"/>
-                    </a:lnL>
-                    <a:lnR w="6350" cap="flat" cmpd="sng" algn="ctr">
-                      <a:solidFill>
-                        <a:srgbClr val="DDDDDD"/>
-                      </a:solidFill>
-                      <a:prstDash val="solid"/>
-                      <a:round/>
-                      <a:headEnd type="none" w="med" len="med"/>
-                      <a:tailEnd type="none" w="med" len="med"/>
-                    </a:lnR>
-                    <a:lnT w="6350" cap="flat" cmpd="sng" algn="ctr">
-                      <a:solidFill>
-                        <a:srgbClr val="DDDDDD"/>
-                      </a:solidFill>
-                      <a:prstDash val="solid"/>
-                      <a:round/>
-                      <a:headEnd type="none" w="med" len="med"/>
-                      <a:tailEnd type="none" w="med" len="med"/>
-                    </a:lnT>
-                    <a:lnB w="6350" cap="flat" cmpd="sng" algn="ctr">
-                      <a:solidFill>
-                        <a:srgbClr val="DDDDDD"/>
-                      </a:solidFill>
-                      <a:prstDash val="solid"/>
-                      <a:round/>
-                      <a:headEnd type="none" w="med" len="med"/>
-                      <a:tailEnd type="none" w="med" len="med"/>
-                    </a:lnB>
-                    <a:solidFill>
-                      <a:srgbClr val="F2F2F2"/>
                     </a:solidFill>
                   </a:tcPr>
                 </a:tc>

--- a/presentation/UNanofabTools/flaskserver/slides/14-Security-Model.pptx
+++ b/presentation/UNanofabTools/flaskserver/slides/14-Security-Model.pptx
@@ -952,7 +952,7 @@
           <a:p>
             <a:r>
               <a:rPr lang="en-US" dirty="0"/>
-              <a:t>This is the strongest area. Real passwords are never stored; only irreversible fingerprints. Two-factor via Duo is mandatory in production. The login cookie is cryptographically signed so it can't be forged and is only sent over encryption in production. The configured two-hour lifetime applies only to permanent sessions, and the current login flow does not mark sessions permanent. Permissions are simple but enforced server-side, not just hidden in the page. For the human-facing app, this is a solid, conventional security posture.</a:t>
+              <a:t>This is the strongest area. Real passwords are never stored; only irreversible fingerprints — and the raw password is hashed as typed, never run through the input sanitizer (escaping a value that's only ever hashed would just weaken it). Two-factor via Duo is mandatory in production. The login cookie is cryptographically signed so it can't be forged and is only sent over encryption in production; in production the app now fails closed and won't even start if the secret key is missing or the default. Permissions are simple but enforced server-side, not just hidden in the page — and the admin panel has lockout guards so an admin can't accidentally delete their own account or remove the last remaining admin. For the human-facing app, this is a solid, conventional security posture.</a:t>
             </a:r>
             <a:endParaRPr lang="en-US" dirty="0"/>
           </a:p>
@@ -1040,7 +1040,7 @@
           <a:p>
             <a:r>
               <a:rPr lang="en-US" dirty="0"/>
-              <a:t>Two more solid areas. All database access treats typed-in values as data, never commands, which stops injection attacks — the most common web vulnerability. The page templates automatically escape values, which blunts cross-site scripting. File downloads use the proper resolve-then-verify path check from the machines session. Uploads are restricted by type and given safe, unique names. The fundamentals are handled correctly.</a:t>
+              <a:t>Two more solid areas. All database access treats typed-in values as data, never commands, which stops injection attacks — the most common web vulnerability. The page templates automatically escape values, and the one place that builds HTML by hand (the machine-data table) escapes every cell too, so cross-site scripting is blunted throughout. Cross-site request forgery is now handled with real tokens: every browser form and every AJAX action must present a CSRF token, added automatically to same-origin requests; only the device/IoT API is exempt (sensors can't carry one). File downloads use the proper resolve-then-verify path check, and the Parylene device-upload endpoints allow-list the session ID so a value like '../..' can't write outside the data folder. Uploads are restricted by type and given safe, unique names. The fundamentals are handled correctly.</a:t>
             </a:r>
             <a:endParaRPr lang="en-US" dirty="0"/>
           </a:p>
@@ -1216,7 +1216,7 @@
           <a:p>
             <a:r>
               <a:rPr lang="en-US" dirty="0"/>
-              <a:t>Give a concrete priority list. First and easiest with the biggest payoff: require login on the inventory pages that change data. Then, only if the server's exposure ever grows, add a shared key to the device endpoints. Then narrow cross-origin access. Then strengthen password reset with a second factor. This is the practical roadmap a successor would follow.</a:t>
+              <a:t>Give a concrete priority list. The old top item — requiring login on the inventory's editing pages — is already done: the whole chemical inventory now sits behind a WordPress signed-token sign-on. So the remaining roadmap is: first, only if the server's exposure ever grows, add a shared key to the device endpoints. Then narrow cross-origin access to the known internal tools. Then strengthen password reset with a second factor. This is the practical roadmap a successor would follow.</a:t>
             </a:r>
             <a:endParaRPr lang="en-US" dirty="0"/>
           </a:p>
@@ -3469,7 +3469,7 @@
                 <a:ea typeface="Calibri" pitchFamily="34" charset="-122"/>
                 <a:cs typeface="Calibri" pitchFamily="34" charset="-120"/>
               </a:rPr>
-              <a:t>Passwords stored only as irreversible bcrypt fingerprints.</a:t>
+              <a:t>Passwords stored only as irreversible bcrypt fingerprints (the raw password is hashed, never altered or escaped).</a:t>
             </a:r>
             <a:endParaRPr lang="en-US" sz="1500" dirty="0"/>
           </a:p>
@@ -3511,7 +3511,7 @@
                 <a:ea typeface="Calibri" pitchFamily="34" charset="-122"/>
                 <a:cs typeface="Calibri" pitchFamily="34" charset="-120"/>
               </a:rPr>
-              <a:t>Login cookie is signed (tamper-proof) and HTTPS-only in production.</a:t>
+              <a:t>Login cookie is signed and HTTPS-only in production; the app refuses to start without a strong secret key.</a:t>
             </a:r>
             <a:endParaRPr lang="en-US" sz="1500" dirty="0"/>
           </a:p>
@@ -3532,7 +3532,7 @@
                 <a:ea typeface="Calibri" pitchFamily="34" charset="-122"/>
                 <a:cs typeface="Calibri" pitchFamily="34" charset="-120"/>
               </a:rPr>
-              <a:t>Permissions are two flags — admin and can-assign — enforced on the server.</a:t>
+              <a:t>Two permission flags — admin and can-assign — enforced on the server; admins can't delete themselves or the last admin.</a:t>
             </a:r>
             <a:endParaRPr lang="en-US" sz="1500" dirty="0"/>
           </a:p>
@@ -3785,7 +3785,7 @@
                 <a:ea typeface="Calibri" pitchFamily="34" charset="-122"/>
                 <a:cs typeface="Calibri" pitchFamily="34" charset="-120"/>
               </a:rPr>
-              <a:t>Page templates auto-escape values, blunting cross-site scripting.</a:t>
+              <a:t>Templates auto-escape values, and the hand-built machine table escapes every cell too.</a:t>
             </a:r>
             <a:endParaRPr lang="en-US" sz="1500" dirty="0"/>
           </a:p>
@@ -3806,7 +3806,28 @@
                 <a:ea typeface="Calibri" pitchFamily="34" charset="-122"/>
                 <a:cs typeface="Calibri" pitchFamily="34" charset="-120"/>
               </a:rPr>
-              <a:t>Downloads use a resolve-then-verify check to stay inside their folder.</a:t>
+              <a:t>Every browser form and AJAX action carries a CSRF token (Flask-WTF); the device API is exempt.</a:t>
+            </a:r>
+            <a:endParaRPr lang="en-US" sz="1500" dirty="0"/>
+          </a:p>
+          <a:p>
+            <a:pPr marL="228600" indent="-228600">
+              <a:spcAft>
+                <a:spcPts val="1000"/>
+              </a:spcAft>
+              <a:buSzPct val="100000"/>
+              <a:buChar char="•"/>
+            </a:pPr>
+            <a:r>
+              <a:rPr lang="en-US" sz="1500" dirty="0">
+                <a:solidFill>
+                  <a:srgbClr val="1A1A1A"/>
+                </a:solidFill>
+                <a:latin typeface="Calibri" pitchFamily="34" charset="0"/>
+                <a:ea typeface="Calibri" pitchFamily="34" charset="-122"/>
+                <a:cs typeface="Calibri" pitchFamily="34" charset="-120"/>
+              </a:rPr>
+              <a:t>Downloads resolve-then-verify; device upload session IDs are allow-listed so they can't escape their folder.</a:t>
             </a:r>
             <a:endParaRPr lang="en-US" sz="1500" dirty="0"/>
           </a:p>
@@ -4869,28 +4890,7 @@
                 <a:ea typeface="Calibri" pitchFamily="34" charset="-122"/>
                 <a:cs typeface="Calibri" pitchFamily="34" charset="-120"/>
               </a:rPr>
-              <a:t>Require login on the inventory's editing/removing pages.</a:t>
-            </a:r>
-            <a:endParaRPr lang="en-US" sz="1500" dirty="0"/>
-          </a:p>
-          <a:p>
-            <a:pPr marL="228600" indent="-228600">
-              <a:spcAft>
-                <a:spcPts val="1000"/>
-              </a:spcAft>
-              <a:buSzPct val="100000"/>
-              <a:buChar char="•"/>
-            </a:pPr>
-            <a:r>
-              <a:rPr lang="en-US" sz="1500" dirty="0">
-                <a:solidFill>
-                  <a:srgbClr val="1A1A1A"/>
-                </a:solidFill>
-                <a:latin typeface="Calibri" pitchFamily="34" charset="0"/>
-                <a:ea typeface="Calibri" pitchFamily="34" charset="-122"/>
-                <a:cs typeface="Calibri" pitchFamily="34" charset="-120"/>
-              </a:rPr>
-              <a:t>Add an access key (or similar) to the device endpoints if ever exposed.</a:t>
+              <a:t>Add an access key (or signed request) to the device endpoints if ever exposed.</a:t>
             </a:r>
             <a:endParaRPr lang="en-US" sz="1500" dirty="0"/>
           </a:p>
